--- a/Planning docs/Slides/lesson-9-1-teacher-slides.pptx
+++ b/Planning docs/Slides/lesson-9-1-teacher-slides.pptx
@@ -4874,7 +4874,7 @@
                 <a:ea typeface="Calibri" pitchFamily="34" charset="-122"/>
                 <a:cs typeface="Calibri" pitchFamily="34" charset="-120"/>
               </a:rPr>
-              <a:t>•  What does Roscuro want that other rats do not?</a:t>
+              <a:t>•  The author says Roscuro was born in total darkness. What details show us just how dark the dungeon really is?</a:t>
             </a:r>
             <a:endParaRPr lang="en-US" sz="1500" dirty="0"/>
           </a:p>
@@ -4891,24 +4891,7 @@
                 <a:ea typeface="Calibri" pitchFamily="34" charset="-122"/>
                 <a:cs typeface="Calibri" pitchFamily="34" charset="-120"/>
               </a:rPr>
-              <a:t>•  What stands between Roscuro and what he wants?</a:t>
-            </a:r>
-            <a:endParaRPr lang="en-US" sz="1500" dirty="0"/>
-          </a:p>
-          <a:p>
-            <a:pPr indent="0" marL="0">
-              <a:buNone/>
-            </a:pPr>
-            <a:r>
-              <a:rPr lang="en-US" sz="1500" dirty="0">
-                <a:solidFill>
-                  <a:srgbClr val="1E293B"/>
-                </a:solidFill>
-                <a:latin typeface="Calibri" pitchFamily="34" charset="0"/>
-                <a:ea typeface="Calibri" pitchFamily="34" charset="-122"/>
-                <a:cs typeface="Calibri" pitchFamily="34" charset="-120"/>
-              </a:rPr>
-              <a:t>•  How does this compare to what Despereaux wants?</a:t>
+              <a:t>•  Roscuro sees a light "calling to him." How is this moment similar to when Despereaux heard music for the first time?</a:t>
             </a:r>
             <a:endParaRPr lang="en-US" sz="1500" dirty="0"/>
           </a:p>
